--- a/livro_ia_educacao/saida/pptx/Cap04_slides.pptx
+++ b/livro_ia_educacao/saida/pptx/Cap04_slides.pptx
@@ -8445,11 +8445,11 @@
         <p:spPr>
           <a:xfrm>
             <a:off x="548640" y="1417320"/>
-            <a:ext cx="11064240" cy="762000"/>
+            <a:ext cx="11064240" cy="682752"/>
           </a:xfrm>
           <a:prstGeom prst="roundRect">
             <a:avLst>
-              <a:gd name="adj" fmla="val 14400"/>
+              <a:gd name="adj" fmla="val 16071"/>
             </a:avLst>
           </a:prstGeom>
           <a:solidFill>
@@ -8476,7 +8476,7 @@
         <p:spPr>
           <a:xfrm>
             <a:off x="731520" y="1417320"/>
-            <a:ext cx="548640" cy="762000"/>
+            <a:ext cx="548640" cy="682752"/>
           </a:xfrm>
           <a:prstGeom prst="rect">
             <a:avLst/>
@@ -8512,7 +8512,7 @@
         <p:spPr>
           <a:xfrm>
             <a:off x="1463040" y="1417320"/>
-            <a:ext cx="9966960" cy="762000"/>
+            <a:ext cx="9966960" cy="682752"/>
           </a:xfrm>
           <a:prstGeom prst="rect">
             <a:avLst/>
@@ -8547,12 +8547,12 @@
         </p:nvSpPr>
         <p:spPr>
           <a:xfrm>
-            <a:off x="548640" y="2289048"/>
-            <a:ext cx="11064240" cy="762000"/>
+            <a:off x="548640" y="2209800"/>
+            <a:ext cx="11064240" cy="682752"/>
           </a:xfrm>
           <a:prstGeom prst="roundRect">
             <a:avLst>
-              <a:gd name="adj" fmla="val 14400"/>
+              <a:gd name="adj" fmla="val 16071"/>
             </a:avLst>
           </a:prstGeom>
           <a:solidFill>
@@ -8578,8 +8578,8 @@
         </p:nvSpPr>
         <p:spPr>
           <a:xfrm>
-            <a:off x="731520" y="2289048"/>
-            <a:ext cx="548640" cy="762000"/>
+            <a:off x="731520" y="2209800"/>
+            <a:ext cx="548640" cy="682752"/>
           </a:xfrm>
           <a:prstGeom prst="rect">
             <a:avLst/>
@@ -8614,8 +8614,8 @@
         </p:nvSpPr>
         <p:spPr>
           <a:xfrm>
-            <a:off x="1463040" y="2289048"/>
-            <a:ext cx="9966960" cy="762000"/>
+            <a:off x="1463040" y="2209800"/>
+            <a:ext cx="9966960" cy="682752"/>
           </a:xfrm>
           <a:prstGeom prst="rect">
             <a:avLst/>
@@ -8650,12 +8650,12 @@
         </p:nvSpPr>
         <p:spPr>
           <a:xfrm>
-            <a:off x="548640" y="3160776"/>
-            <a:ext cx="11064240" cy="762000"/>
+            <a:off x="548640" y="3002280"/>
+            <a:ext cx="11064240" cy="682752"/>
           </a:xfrm>
           <a:prstGeom prst="roundRect">
             <a:avLst>
-              <a:gd name="adj" fmla="val 14400"/>
+              <a:gd name="adj" fmla="val 16071"/>
             </a:avLst>
           </a:prstGeom>
           <a:solidFill>
@@ -8681,8 +8681,8 @@
         </p:nvSpPr>
         <p:spPr>
           <a:xfrm>
-            <a:off x="731520" y="3160776"/>
-            <a:ext cx="548640" cy="762000"/>
+            <a:off x="731520" y="3002280"/>
+            <a:ext cx="548640" cy="682752"/>
           </a:xfrm>
           <a:prstGeom prst="rect">
             <a:avLst/>
@@ -8717,8 +8717,8 @@
         </p:nvSpPr>
         <p:spPr>
           <a:xfrm>
-            <a:off x="1463040" y="3160776"/>
-            <a:ext cx="9966960" cy="762000"/>
+            <a:off x="1463040" y="3002280"/>
+            <a:ext cx="9966960" cy="682752"/>
           </a:xfrm>
           <a:prstGeom prst="rect">
             <a:avLst/>
@@ -8753,12 +8753,12 @@
         </p:nvSpPr>
         <p:spPr>
           <a:xfrm>
-            <a:off x="548640" y="4032504"/>
-            <a:ext cx="11064240" cy="762000"/>
+            <a:off x="548640" y="3794760"/>
+            <a:ext cx="11064240" cy="682752"/>
           </a:xfrm>
           <a:prstGeom prst="roundRect">
             <a:avLst>
-              <a:gd name="adj" fmla="val 14400"/>
+              <a:gd name="adj" fmla="val 16071"/>
             </a:avLst>
           </a:prstGeom>
           <a:solidFill>
@@ -8784,8 +8784,8 @@
         </p:nvSpPr>
         <p:spPr>
           <a:xfrm>
-            <a:off x="731520" y="4032504"/>
-            <a:ext cx="548640" cy="762000"/>
+            <a:off x="731520" y="3794760"/>
+            <a:ext cx="548640" cy="682752"/>
           </a:xfrm>
           <a:prstGeom prst="rect">
             <a:avLst/>
@@ -8820,8 +8820,8 @@
         </p:nvSpPr>
         <p:spPr>
           <a:xfrm>
-            <a:off x="1463040" y="4032504"/>
-            <a:ext cx="9966960" cy="762000"/>
+            <a:off x="1463040" y="3794760"/>
+            <a:ext cx="9966960" cy="682752"/>
           </a:xfrm>
           <a:prstGeom prst="rect">
             <a:avLst/>
@@ -8856,12 +8856,12 @@
         </p:nvSpPr>
         <p:spPr>
           <a:xfrm>
-            <a:off x="548640" y="4904232"/>
-            <a:ext cx="11064240" cy="762000"/>
+            <a:off x="548640" y="4587240"/>
+            <a:ext cx="11064240" cy="682752"/>
           </a:xfrm>
           <a:prstGeom prst="roundRect">
             <a:avLst>
-              <a:gd name="adj" fmla="val 14400"/>
+              <a:gd name="adj" fmla="val 16071"/>
             </a:avLst>
           </a:prstGeom>
           <a:solidFill>
@@ -8887,8 +8887,8 @@
         </p:nvSpPr>
         <p:spPr>
           <a:xfrm>
-            <a:off x="731520" y="4904232"/>
-            <a:ext cx="548640" cy="762000"/>
+            <a:off x="731520" y="4587240"/>
+            <a:ext cx="548640" cy="682752"/>
           </a:xfrm>
           <a:prstGeom prst="rect">
             <a:avLst/>
@@ -8923,8 +8923,8 @@
         </p:nvSpPr>
         <p:spPr>
           <a:xfrm>
-            <a:off x="1463040" y="4904232"/>
-            <a:ext cx="9966960" cy="762000"/>
+            <a:off x="1463040" y="4587240"/>
+            <a:ext cx="9966960" cy="682752"/>
           </a:xfrm>
           <a:prstGeom prst="rect">
             <a:avLst/>
@@ -8959,12 +8959,12 @@
         </p:nvSpPr>
         <p:spPr>
           <a:xfrm>
-            <a:off x="548640" y="5775960"/>
-            <a:ext cx="11064240" cy="762000"/>
+            <a:off x="548640" y="5379720"/>
+            <a:ext cx="11064240" cy="682752"/>
           </a:xfrm>
           <a:prstGeom prst="roundRect">
             <a:avLst>
-              <a:gd name="adj" fmla="val 14400"/>
+              <a:gd name="adj" fmla="val 16071"/>
             </a:avLst>
           </a:prstGeom>
           <a:solidFill>
@@ -8990,8 +8990,8 @@
         </p:nvSpPr>
         <p:spPr>
           <a:xfrm>
-            <a:off x="731520" y="5775960"/>
-            <a:ext cx="548640" cy="762000"/>
+            <a:off x="731520" y="5379720"/>
+            <a:ext cx="548640" cy="682752"/>
           </a:xfrm>
           <a:prstGeom prst="rect">
             <a:avLst/>
@@ -9026,8 +9026,8 @@
         </p:nvSpPr>
         <p:spPr>
           <a:xfrm>
-            <a:off x="1463040" y="5775960"/>
-            <a:ext cx="9966960" cy="762000"/>
+            <a:off x="1463040" y="5379720"/>
+            <a:ext cx="9966960" cy="682752"/>
           </a:xfrm>
           <a:prstGeom prst="rect">
             <a:avLst/>
